--- a/REA-Conteudo/slides/JavaScript/Carrinho.pptx
+++ b/REA-Conteudo/slides/JavaScript/Carrinho.pptx
@@ -1734,7 +1734,7 @@
                 <a:ea typeface="Courier New" pitchFamily="34" charset="-122"/>
                 <a:cs typeface="Courier New" pitchFamily="34" charset="-120"/>
               </a:rPr>
-              <a:t>Explicação</a:t>
+              <a:t>Elemento exato onde o clique aconteceu</a:t>
             </a:r>
             <a:endParaRPr lang="pt-BR" sz="900" noProof="0" dirty="0"/>
           </a:p>
@@ -1925,7 +1925,7 @@
                 <a:ea typeface="Courier New" pitchFamily="34" charset="-122"/>
                 <a:cs typeface="Courier New" pitchFamily="34" charset="-120"/>
               </a:rPr>
-              <a:t>Explicação</a:t>
+              <a:t>Confirma se o clique foi no botão correto</a:t>
             </a:r>
             <a:endParaRPr lang="pt-BR" sz="900" noProof="0" dirty="0"/>
           </a:p>
@@ -2116,7 +2116,7 @@
                 <a:ea typeface="Courier New" pitchFamily="34" charset="-122"/>
                 <a:cs typeface="Courier New" pitchFamily="34" charset="-120"/>
               </a:rPr>
-              <a:t>Explicação</a:t>
+              <a:t>Sobe na árvore HTML até encontrar o ancestral com o seletor</a:t>
             </a:r>
             <a:endParaRPr lang="pt-BR" sz="900" noProof="0" dirty="0"/>
           </a:p>
